--- a/Presentation2.pptx
+++ b/Presentation2.pptx
@@ -8,6 +8,7 @@
     <p:sldId id="257" r:id="rId2"/>
     <p:sldId id="260" r:id="rId3"/>
     <p:sldId id="261" r:id="rId4"/>
+    <p:sldId id="262" r:id="rId5"/>
   </p:sldIdLst>
   <p:sldSz cx="12192000" cy="6858000"/>
   <p:notesSz cx="6858000" cy="9144000"/>
@@ -1488,7 +1489,7 @@
           <a:p>
             <a:fld id="{E35C42DE-20E7-B947-98AE-BA8D10C43E80}" type="datetimeFigureOut">
               <a:rPr lang="en-US" smtClean="0"/>
-              <a:t>10/14/24</a:t>
+              <a:t>11/5/24</a:t>
             </a:fld>
             <a:endParaRPr lang="en-US"/>
           </a:p>
@@ -1688,7 +1689,7 @@
           <a:p>
             <a:fld id="{E35C42DE-20E7-B947-98AE-BA8D10C43E80}" type="datetimeFigureOut">
               <a:rPr lang="en-US" smtClean="0"/>
-              <a:t>10/14/24</a:t>
+              <a:t>11/5/24</a:t>
             </a:fld>
             <a:endParaRPr lang="en-US"/>
           </a:p>
@@ -1898,7 +1899,7 @@
           <a:p>
             <a:fld id="{E35C42DE-20E7-B947-98AE-BA8D10C43E80}" type="datetimeFigureOut">
               <a:rPr lang="en-US" smtClean="0"/>
-              <a:t>10/14/24</a:t>
+              <a:t>11/5/24</a:t>
             </a:fld>
             <a:endParaRPr lang="en-US"/>
           </a:p>
@@ -2098,7 +2099,7 @@
           <a:p>
             <a:fld id="{E35C42DE-20E7-B947-98AE-BA8D10C43E80}" type="datetimeFigureOut">
               <a:rPr lang="en-US" smtClean="0"/>
-              <a:t>10/14/24</a:t>
+              <a:t>11/5/24</a:t>
             </a:fld>
             <a:endParaRPr lang="en-US"/>
           </a:p>
@@ -2374,7 +2375,7 @@
           <a:p>
             <a:fld id="{E35C42DE-20E7-B947-98AE-BA8D10C43E80}" type="datetimeFigureOut">
               <a:rPr lang="en-US" smtClean="0"/>
-              <a:t>10/14/24</a:t>
+              <a:t>11/5/24</a:t>
             </a:fld>
             <a:endParaRPr lang="en-US"/>
           </a:p>
@@ -2642,7 +2643,7 @@
           <a:p>
             <a:fld id="{E35C42DE-20E7-B947-98AE-BA8D10C43E80}" type="datetimeFigureOut">
               <a:rPr lang="en-US" smtClean="0"/>
-              <a:t>10/14/24</a:t>
+              <a:t>11/5/24</a:t>
             </a:fld>
             <a:endParaRPr lang="en-US"/>
           </a:p>
@@ -3057,7 +3058,7 @@
           <a:p>
             <a:fld id="{E35C42DE-20E7-B947-98AE-BA8D10C43E80}" type="datetimeFigureOut">
               <a:rPr lang="en-US" smtClean="0"/>
-              <a:t>10/14/24</a:t>
+              <a:t>11/5/24</a:t>
             </a:fld>
             <a:endParaRPr lang="en-US"/>
           </a:p>
@@ -3199,7 +3200,7 @@
           <a:p>
             <a:fld id="{E35C42DE-20E7-B947-98AE-BA8D10C43E80}" type="datetimeFigureOut">
               <a:rPr lang="en-US" smtClean="0"/>
-              <a:t>10/14/24</a:t>
+              <a:t>11/5/24</a:t>
             </a:fld>
             <a:endParaRPr lang="en-US"/>
           </a:p>
@@ -3312,7 +3313,7 @@
           <a:p>
             <a:fld id="{E35C42DE-20E7-B947-98AE-BA8D10C43E80}" type="datetimeFigureOut">
               <a:rPr lang="en-US" smtClean="0"/>
-              <a:t>10/14/24</a:t>
+              <a:t>11/5/24</a:t>
             </a:fld>
             <a:endParaRPr lang="en-US"/>
           </a:p>
@@ -3625,7 +3626,7 @@
           <a:p>
             <a:fld id="{E35C42DE-20E7-B947-98AE-BA8D10C43E80}" type="datetimeFigureOut">
               <a:rPr lang="en-US" smtClean="0"/>
-              <a:t>10/14/24</a:t>
+              <a:t>11/5/24</a:t>
             </a:fld>
             <a:endParaRPr lang="en-US"/>
           </a:p>
@@ -3914,7 +3915,7 @@
           <a:p>
             <a:fld id="{E35C42DE-20E7-B947-98AE-BA8D10C43E80}" type="datetimeFigureOut">
               <a:rPr lang="en-US" smtClean="0"/>
-              <a:t>10/14/24</a:t>
+              <a:t>11/5/24</a:t>
             </a:fld>
             <a:endParaRPr lang="en-US"/>
           </a:p>
@@ -4157,7 +4158,7 @@
           <a:p>
             <a:fld id="{E35C42DE-20E7-B947-98AE-BA8D10C43E80}" type="datetimeFigureOut">
               <a:rPr lang="en-US" smtClean="0"/>
-              <a:t>10/14/24</a:t>
+              <a:t>11/5/24</a:t>
             </a:fld>
             <a:endParaRPr lang="en-US"/>
           </a:p>
@@ -6925,8 +6926,8 @@
           </a:p>
         </p:txBody>
       </p:sp>
-      <mc:AlternateContent xmlns:mc="http://schemas.openxmlformats.org/markup-compatibility/2006">
-        <mc:Choice xmlns:p14="http://schemas.microsoft.com/office/powerpoint/2010/main" Requires="p14">
+      <mc:AlternateContent xmlns:mc="http://schemas.openxmlformats.org/markup-compatibility/2006" xmlns:p14="http://schemas.microsoft.com/office/powerpoint/2010/main">
+        <mc:Choice Requires="p14">
           <p:contentPart p14:bwMode="auto" r:id="rId3">
             <p14:nvContentPartPr>
               <p14:cNvPr id="51" name="Ink 50">
@@ -6945,7 +6946,7 @@
             </p14:xfrm>
           </p:contentPart>
         </mc:Choice>
-        <mc:Fallback>
+        <mc:Fallback xmlns="">
           <p:pic>
             <p:nvPicPr>
               <p:cNvPr id="51" name="Ink 50">
@@ -6976,8 +6977,8 @@
           </p:pic>
         </mc:Fallback>
       </mc:AlternateContent>
-      <mc:AlternateContent xmlns:mc="http://schemas.openxmlformats.org/markup-compatibility/2006">
-        <mc:Choice xmlns:p14="http://schemas.microsoft.com/office/powerpoint/2010/main" Requires="p14">
+      <mc:AlternateContent xmlns:mc="http://schemas.openxmlformats.org/markup-compatibility/2006" xmlns:p14="http://schemas.microsoft.com/office/powerpoint/2010/main">
+        <mc:Choice Requires="p14">
           <p:contentPart p14:bwMode="auto" r:id="rId5">
             <p14:nvContentPartPr>
               <p14:cNvPr id="52" name="Ink 51">
@@ -6996,7 +6997,7 @@
             </p14:xfrm>
           </p:contentPart>
         </mc:Choice>
-        <mc:Fallback>
+        <mc:Fallback xmlns="">
           <p:pic>
             <p:nvPicPr>
               <p:cNvPr id="52" name="Ink 51">
@@ -7027,8 +7028,8 @@
           </p:pic>
         </mc:Fallback>
       </mc:AlternateContent>
-      <mc:AlternateContent xmlns:mc="http://schemas.openxmlformats.org/markup-compatibility/2006">
-        <mc:Choice xmlns:p14="http://schemas.microsoft.com/office/powerpoint/2010/main" Requires="p14">
+      <mc:AlternateContent xmlns:mc="http://schemas.openxmlformats.org/markup-compatibility/2006" xmlns:p14="http://schemas.microsoft.com/office/powerpoint/2010/main">
+        <mc:Choice Requires="p14">
           <p:contentPart p14:bwMode="auto" r:id="rId6">
             <p14:nvContentPartPr>
               <p14:cNvPr id="53" name="Ink 52">
@@ -7047,7 +7048,7 @@
             </p14:xfrm>
           </p:contentPart>
         </mc:Choice>
-        <mc:Fallback>
+        <mc:Fallback xmlns="">
           <p:pic>
             <p:nvPicPr>
               <p:cNvPr id="53" name="Ink 52">
@@ -7078,8 +7079,8 @@
           </p:pic>
         </mc:Fallback>
       </mc:AlternateContent>
-      <mc:AlternateContent xmlns:mc="http://schemas.openxmlformats.org/markup-compatibility/2006">
-        <mc:Choice xmlns:p14="http://schemas.microsoft.com/office/powerpoint/2010/main" Requires="p14">
+      <mc:AlternateContent xmlns:mc="http://schemas.openxmlformats.org/markup-compatibility/2006" xmlns:p14="http://schemas.microsoft.com/office/powerpoint/2010/main">
+        <mc:Choice Requires="p14">
           <p:contentPart p14:bwMode="auto" r:id="rId8">
             <p14:nvContentPartPr>
               <p14:cNvPr id="54" name="Ink 53">
@@ -7098,7 +7099,7 @@
             </p14:xfrm>
           </p:contentPart>
         </mc:Choice>
-        <mc:Fallback>
+        <mc:Fallback xmlns="">
           <p:pic>
             <p:nvPicPr>
               <p:cNvPr id="54" name="Ink 53">
@@ -7129,8 +7130,8 @@
           </p:pic>
         </mc:Fallback>
       </mc:AlternateContent>
-      <mc:AlternateContent xmlns:mc="http://schemas.openxmlformats.org/markup-compatibility/2006">
-        <mc:Choice xmlns:p14="http://schemas.microsoft.com/office/powerpoint/2010/main" Requires="p14">
+      <mc:AlternateContent xmlns:mc="http://schemas.openxmlformats.org/markup-compatibility/2006" xmlns:p14="http://schemas.microsoft.com/office/powerpoint/2010/main">
+        <mc:Choice Requires="p14">
           <p:contentPart p14:bwMode="auto" r:id="rId9">
             <p14:nvContentPartPr>
               <p14:cNvPr id="55" name="Ink 54">
@@ -7149,7 +7150,7 @@
             </p14:xfrm>
           </p:contentPart>
         </mc:Choice>
-        <mc:Fallback>
+        <mc:Fallback xmlns="">
           <p:pic>
             <p:nvPicPr>
               <p:cNvPr id="55" name="Ink 54">
@@ -7180,8 +7181,8 @@
           </p:pic>
         </mc:Fallback>
       </mc:AlternateContent>
-      <mc:AlternateContent xmlns:mc="http://schemas.openxmlformats.org/markup-compatibility/2006">
-        <mc:Choice xmlns:p14="http://schemas.microsoft.com/office/powerpoint/2010/main" Requires="p14">
+      <mc:AlternateContent xmlns:mc="http://schemas.openxmlformats.org/markup-compatibility/2006" xmlns:p14="http://schemas.microsoft.com/office/powerpoint/2010/main">
+        <mc:Choice Requires="p14">
           <p:contentPart p14:bwMode="auto" r:id="rId10">
             <p14:nvContentPartPr>
               <p14:cNvPr id="56" name="Ink 55">
@@ -7200,7 +7201,7 @@
             </p14:xfrm>
           </p:contentPart>
         </mc:Choice>
-        <mc:Fallback>
+        <mc:Fallback xmlns="">
           <p:pic>
             <p:nvPicPr>
               <p:cNvPr id="56" name="Ink 55">
@@ -7231,8 +7232,8 @@
           </p:pic>
         </mc:Fallback>
       </mc:AlternateContent>
-      <mc:AlternateContent xmlns:mc="http://schemas.openxmlformats.org/markup-compatibility/2006">
-        <mc:Choice xmlns:p14="http://schemas.microsoft.com/office/powerpoint/2010/main" Requires="p14">
+      <mc:AlternateContent xmlns:mc="http://schemas.openxmlformats.org/markup-compatibility/2006" xmlns:p14="http://schemas.microsoft.com/office/powerpoint/2010/main">
+        <mc:Choice Requires="p14">
           <p:contentPart p14:bwMode="auto" r:id="rId11">
             <p14:nvContentPartPr>
               <p14:cNvPr id="57" name="Ink 56">
@@ -7251,7 +7252,7 @@
             </p14:xfrm>
           </p:contentPart>
         </mc:Choice>
-        <mc:Fallback>
+        <mc:Fallback xmlns="">
           <p:pic>
             <p:nvPicPr>
               <p:cNvPr id="57" name="Ink 56">
@@ -7282,8 +7283,8 @@
           </p:pic>
         </mc:Fallback>
       </mc:AlternateContent>
-      <mc:AlternateContent xmlns:mc="http://schemas.openxmlformats.org/markup-compatibility/2006">
-        <mc:Choice xmlns:p14="http://schemas.microsoft.com/office/powerpoint/2010/main" Requires="p14">
+      <mc:AlternateContent xmlns:mc="http://schemas.openxmlformats.org/markup-compatibility/2006" xmlns:p14="http://schemas.microsoft.com/office/powerpoint/2010/main">
+        <mc:Choice Requires="p14">
           <p:contentPart p14:bwMode="auto" r:id="rId12">
             <p14:nvContentPartPr>
               <p14:cNvPr id="58" name="Ink 57">
@@ -7302,7 +7303,7 @@
             </p14:xfrm>
           </p:contentPart>
         </mc:Choice>
-        <mc:Fallback>
+        <mc:Fallback xmlns="">
           <p:pic>
             <p:nvPicPr>
               <p:cNvPr id="58" name="Ink 57">
@@ -7333,8 +7334,8 @@
           </p:pic>
         </mc:Fallback>
       </mc:AlternateContent>
-      <mc:AlternateContent xmlns:mc="http://schemas.openxmlformats.org/markup-compatibility/2006">
-        <mc:Choice xmlns:p14="http://schemas.microsoft.com/office/powerpoint/2010/main" Requires="p14">
+      <mc:AlternateContent xmlns:mc="http://schemas.openxmlformats.org/markup-compatibility/2006" xmlns:p14="http://schemas.microsoft.com/office/powerpoint/2010/main">
+        <mc:Choice Requires="p14">
           <p:contentPart p14:bwMode="auto" r:id="rId14">
             <p14:nvContentPartPr>
               <p14:cNvPr id="59" name="Ink 58">
@@ -7353,7 +7354,7 @@
             </p14:xfrm>
           </p:contentPart>
         </mc:Choice>
-        <mc:Fallback>
+        <mc:Fallback xmlns="">
           <p:pic>
             <p:nvPicPr>
               <p:cNvPr id="59" name="Ink 58">
@@ -7384,8 +7385,8 @@
           </p:pic>
         </mc:Fallback>
       </mc:AlternateContent>
-      <mc:AlternateContent xmlns:mc="http://schemas.openxmlformats.org/markup-compatibility/2006">
-        <mc:Choice xmlns:p14="http://schemas.microsoft.com/office/powerpoint/2010/main" Requires="p14">
+      <mc:AlternateContent xmlns:mc="http://schemas.openxmlformats.org/markup-compatibility/2006" xmlns:p14="http://schemas.microsoft.com/office/powerpoint/2010/main">
+        <mc:Choice Requires="p14">
           <p:contentPart p14:bwMode="auto" r:id="rId15">
             <p14:nvContentPartPr>
               <p14:cNvPr id="60" name="Ink 59">
@@ -7404,7 +7405,7 @@
             </p14:xfrm>
           </p:contentPart>
         </mc:Choice>
-        <mc:Fallback>
+        <mc:Fallback xmlns="">
           <p:pic>
             <p:nvPicPr>
               <p:cNvPr id="60" name="Ink 59">
@@ -7435,8 +7436,8 @@
           </p:pic>
         </mc:Fallback>
       </mc:AlternateContent>
-      <mc:AlternateContent xmlns:mc="http://schemas.openxmlformats.org/markup-compatibility/2006">
-        <mc:Choice xmlns:p14="http://schemas.microsoft.com/office/powerpoint/2010/main" Requires="p14">
+      <mc:AlternateContent xmlns:mc="http://schemas.openxmlformats.org/markup-compatibility/2006" xmlns:p14="http://schemas.microsoft.com/office/powerpoint/2010/main">
+        <mc:Choice Requires="p14">
           <p:contentPart p14:bwMode="auto" r:id="rId16">
             <p14:nvContentPartPr>
               <p14:cNvPr id="61" name="Ink 60">
@@ -7455,7 +7456,7 @@
             </p14:xfrm>
           </p:contentPart>
         </mc:Choice>
-        <mc:Fallback>
+        <mc:Fallback xmlns="">
           <p:pic>
             <p:nvPicPr>
               <p:cNvPr id="61" name="Ink 60">
@@ -7486,8 +7487,8 @@
           </p:pic>
         </mc:Fallback>
       </mc:AlternateContent>
-      <mc:AlternateContent xmlns:mc="http://schemas.openxmlformats.org/markup-compatibility/2006">
-        <mc:Choice xmlns:p14="http://schemas.microsoft.com/office/powerpoint/2010/main" Requires="p14">
+      <mc:AlternateContent xmlns:mc="http://schemas.openxmlformats.org/markup-compatibility/2006" xmlns:p14="http://schemas.microsoft.com/office/powerpoint/2010/main">
+        <mc:Choice Requires="p14">
           <p:contentPart p14:bwMode="auto" r:id="rId17">
             <p14:nvContentPartPr>
               <p14:cNvPr id="62" name="Ink 61">
@@ -7506,7 +7507,7 @@
             </p14:xfrm>
           </p:contentPart>
         </mc:Choice>
-        <mc:Fallback>
+        <mc:Fallback xmlns="">
           <p:pic>
             <p:nvPicPr>
               <p:cNvPr id="62" name="Ink 61">
@@ -7537,8 +7538,8 @@
           </p:pic>
         </mc:Fallback>
       </mc:AlternateContent>
-      <mc:AlternateContent xmlns:mc="http://schemas.openxmlformats.org/markup-compatibility/2006">
-        <mc:Choice xmlns:p14="http://schemas.microsoft.com/office/powerpoint/2010/main" Requires="p14">
+      <mc:AlternateContent xmlns:mc="http://schemas.openxmlformats.org/markup-compatibility/2006" xmlns:p14="http://schemas.microsoft.com/office/powerpoint/2010/main">
+        <mc:Choice Requires="p14">
           <p:contentPart p14:bwMode="auto" r:id="rId18">
             <p14:nvContentPartPr>
               <p14:cNvPr id="63" name="Ink 62">
@@ -7557,7 +7558,7 @@
             </p14:xfrm>
           </p:contentPart>
         </mc:Choice>
-        <mc:Fallback>
+        <mc:Fallback xmlns="">
           <p:pic>
             <p:nvPicPr>
               <p:cNvPr id="63" name="Ink 62">
@@ -7588,8 +7589,8 @@
           </p:pic>
         </mc:Fallback>
       </mc:AlternateContent>
-      <mc:AlternateContent xmlns:mc="http://schemas.openxmlformats.org/markup-compatibility/2006">
-        <mc:Choice xmlns:p14="http://schemas.microsoft.com/office/powerpoint/2010/main" Requires="p14">
+      <mc:AlternateContent xmlns:mc="http://schemas.openxmlformats.org/markup-compatibility/2006" xmlns:p14="http://schemas.microsoft.com/office/powerpoint/2010/main">
+        <mc:Choice Requires="p14">
           <p:contentPart p14:bwMode="auto" r:id="rId19">
             <p14:nvContentPartPr>
               <p14:cNvPr id="64" name="Ink 63">
@@ -7608,7 +7609,7 @@
             </p14:xfrm>
           </p:contentPart>
         </mc:Choice>
-        <mc:Fallback>
+        <mc:Fallback xmlns="">
           <p:pic>
             <p:nvPicPr>
               <p:cNvPr id="64" name="Ink 63">
@@ -7639,8 +7640,8 @@
           </p:pic>
         </mc:Fallback>
       </mc:AlternateContent>
-      <mc:AlternateContent xmlns:mc="http://schemas.openxmlformats.org/markup-compatibility/2006">
-        <mc:Choice xmlns:p14="http://schemas.microsoft.com/office/powerpoint/2010/main" Requires="p14">
+      <mc:AlternateContent xmlns:mc="http://schemas.openxmlformats.org/markup-compatibility/2006" xmlns:p14="http://schemas.microsoft.com/office/powerpoint/2010/main">
+        <mc:Choice Requires="p14">
           <p:contentPart p14:bwMode="auto" r:id="rId20">
             <p14:nvContentPartPr>
               <p14:cNvPr id="65" name="Ink 64">
@@ -7659,7 +7660,7 @@
             </p14:xfrm>
           </p:contentPart>
         </mc:Choice>
-        <mc:Fallback>
+        <mc:Fallback xmlns="">
           <p:pic>
             <p:nvPicPr>
               <p:cNvPr id="65" name="Ink 64">
@@ -7821,8 +7822,8 @@
           </a:p>
         </p:txBody>
       </p:sp>
-      <mc:AlternateContent xmlns:mc="http://schemas.openxmlformats.org/markup-compatibility/2006">
-        <mc:Choice xmlns:p14="http://schemas.microsoft.com/office/powerpoint/2010/main" Requires="p14">
+      <mc:AlternateContent xmlns:mc="http://schemas.openxmlformats.org/markup-compatibility/2006" xmlns:p14="http://schemas.microsoft.com/office/powerpoint/2010/main">
+        <mc:Choice Requires="p14">
           <p:contentPart p14:bwMode="auto" r:id="rId21">
             <p14:nvContentPartPr>
               <p14:cNvPr id="71" name="Ink 70">
@@ -7841,7 +7842,7 @@
             </p14:xfrm>
           </p:contentPart>
         </mc:Choice>
-        <mc:Fallback>
+        <mc:Fallback xmlns="">
           <p:pic>
             <p:nvPicPr>
               <p:cNvPr id="71" name="Ink 70">
@@ -7872,8 +7873,8 @@
           </p:pic>
         </mc:Fallback>
       </mc:AlternateContent>
-      <mc:AlternateContent xmlns:mc="http://schemas.openxmlformats.org/markup-compatibility/2006">
-        <mc:Choice xmlns:p14="http://schemas.microsoft.com/office/powerpoint/2010/main" Requires="p14">
+      <mc:AlternateContent xmlns:mc="http://schemas.openxmlformats.org/markup-compatibility/2006" xmlns:p14="http://schemas.microsoft.com/office/powerpoint/2010/main">
+        <mc:Choice Requires="p14">
           <p:contentPart p14:bwMode="auto" r:id="rId22">
             <p14:nvContentPartPr>
               <p14:cNvPr id="72" name="Ink 71">
@@ -7892,7 +7893,7 @@
             </p14:xfrm>
           </p:contentPart>
         </mc:Choice>
-        <mc:Fallback>
+        <mc:Fallback xmlns="">
           <p:pic>
             <p:nvPicPr>
               <p:cNvPr id="72" name="Ink 71">
@@ -7923,8 +7924,8 @@
           </p:pic>
         </mc:Fallback>
       </mc:AlternateContent>
-      <mc:AlternateContent xmlns:mc="http://schemas.openxmlformats.org/markup-compatibility/2006">
-        <mc:Choice xmlns:p14="http://schemas.microsoft.com/office/powerpoint/2010/main" Requires="p14">
+      <mc:AlternateContent xmlns:mc="http://schemas.openxmlformats.org/markup-compatibility/2006" xmlns:p14="http://schemas.microsoft.com/office/powerpoint/2010/main">
+        <mc:Choice Requires="p14">
           <p:contentPart p14:bwMode="auto" r:id="rId23">
             <p14:nvContentPartPr>
               <p14:cNvPr id="73" name="Ink 72">
@@ -7943,7 +7944,7 @@
             </p14:xfrm>
           </p:contentPart>
         </mc:Choice>
-        <mc:Fallback>
+        <mc:Fallback xmlns="">
           <p:pic>
             <p:nvPicPr>
               <p:cNvPr id="73" name="Ink 72">
@@ -7974,8 +7975,8 @@
           </p:pic>
         </mc:Fallback>
       </mc:AlternateContent>
-      <mc:AlternateContent xmlns:mc="http://schemas.openxmlformats.org/markup-compatibility/2006">
-        <mc:Choice xmlns:p14="http://schemas.microsoft.com/office/powerpoint/2010/main" Requires="p14">
+      <mc:AlternateContent xmlns:mc="http://schemas.openxmlformats.org/markup-compatibility/2006" xmlns:p14="http://schemas.microsoft.com/office/powerpoint/2010/main">
+        <mc:Choice Requires="p14">
           <p:contentPart p14:bwMode="auto" r:id="rId24">
             <p14:nvContentPartPr>
               <p14:cNvPr id="74" name="Ink 73">
@@ -7994,7 +7995,7 @@
             </p14:xfrm>
           </p:contentPart>
         </mc:Choice>
-        <mc:Fallback>
+        <mc:Fallback xmlns="">
           <p:pic>
             <p:nvPicPr>
               <p:cNvPr id="74" name="Ink 73">
@@ -8025,8 +8026,8 @@
           </p:pic>
         </mc:Fallback>
       </mc:AlternateContent>
-      <mc:AlternateContent xmlns:mc="http://schemas.openxmlformats.org/markup-compatibility/2006">
-        <mc:Choice xmlns:p14="http://schemas.microsoft.com/office/powerpoint/2010/main" Requires="p14">
+      <mc:AlternateContent xmlns:mc="http://schemas.openxmlformats.org/markup-compatibility/2006" xmlns:p14="http://schemas.microsoft.com/office/powerpoint/2010/main">
+        <mc:Choice Requires="p14">
           <p:contentPart p14:bwMode="auto" r:id="rId25">
             <p14:nvContentPartPr>
               <p14:cNvPr id="75" name="Ink 74">
@@ -8045,7 +8046,7 @@
             </p14:xfrm>
           </p:contentPart>
         </mc:Choice>
-        <mc:Fallback>
+        <mc:Fallback xmlns="">
           <p:pic>
             <p:nvPicPr>
               <p:cNvPr id="75" name="Ink 74">
@@ -8076,8 +8077,8 @@
           </p:pic>
         </mc:Fallback>
       </mc:AlternateContent>
-      <mc:AlternateContent xmlns:mc="http://schemas.openxmlformats.org/markup-compatibility/2006">
-        <mc:Choice xmlns:p14="http://schemas.microsoft.com/office/powerpoint/2010/main" Requires="p14">
+      <mc:AlternateContent xmlns:mc="http://schemas.openxmlformats.org/markup-compatibility/2006" xmlns:p14="http://schemas.microsoft.com/office/powerpoint/2010/main">
+        <mc:Choice Requires="p14">
           <p:contentPart p14:bwMode="auto" r:id="rId26">
             <p14:nvContentPartPr>
               <p14:cNvPr id="76" name="Ink 75">
@@ -8096,7 +8097,7 @@
             </p14:xfrm>
           </p:contentPart>
         </mc:Choice>
-        <mc:Fallback>
+        <mc:Fallback xmlns="">
           <p:pic>
             <p:nvPicPr>
               <p:cNvPr id="76" name="Ink 75">
@@ -8127,8 +8128,8 @@
           </p:pic>
         </mc:Fallback>
       </mc:AlternateContent>
-      <mc:AlternateContent xmlns:mc="http://schemas.openxmlformats.org/markup-compatibility/2006">
-        <mc:Choice xmlns:p14="http://schemas.microsoft.com/office/powerpoint/2010/main" Requires="p14">
+      <mc:AlternateContent xmlns:mc="http://schemas.openxmlformats.org/markup-compatibility/2006" xmlns:p14="http://schemas.microsoft.com/office/powerpoint/2010/main">
+        <mc:Choice Requires="p14">
           <p:contentPart p14:bwMode="auto" r:id="rId27">
             <p14:nvContentPartPr>
               <p14:cNvPr id="77" name="Ink 76">
@@ -8147,7 +8148,7 @@
             </p14:xfrm>
           </p:contentPart>
         </mc:Choice>
-        <mc:Fallback>
+        <mc:Fallback xmlns="">
           <p:pic>
             <p:nvPicPr>
               <p:cNvPr id="77" name="Ink 76">
@@ -8178,8 +8179,8 @@
           </p:pic>
         </mc:Fallback>
       </mc:AlternateContent>
-      <mc:AlternateContent xmlns:mc="http://schemas.openxmlformats.org/markup-compatibility/2006">
-        <mc:Choice xmlns:p14="http://schemas.microsoft.com/office/powerpoint/2010/main" Requires="p14">
+      <mc:AlternateContent xmlns:mc="http://schemas.openxmlformats.org/markup-compatibility/2006" xmlns:p14="http://schemas.microsoft.com/office/powerpoint/2010/main">
+        <mc:Choice Requires="p14">
           <p:contentPart p14:bwMode="auto" r:id="rId28">
             <p14:nvContentPartPr>
               <p14:cNvPr id="78" name="Ink 77">
@@ -8198,7 +8199,7 @@
             </p14:xfrm>
           </p:contentPart>
         </mc:Choice>
-        <mc:Fallback>
+        <mc:Fallback xmlns="">
           <p:pic>
             <p:nvPicPr>
               <p:cNvPr id="78" name="Ink 77">
@@ -8229,8 +8230,8 @@
           </p:pic>
         </mc:Fallback>
       </mc:AlternateContent>
-      <mc:AlternateContent xmlns:mc="http://schemas.openxmlformats.org/markup-compatibility/2006">
-        <mc:Choice xmlns:p14="http://schemas.microsoft.com/office/powerpoint/2010/main" Requires="p14">
+      <mc:AlternateContent xmlns:mc="http://schemas.openxmlformats.org/markup-compatibility/2006" xmlns:p14="http://schemas.microsoft.com/office/powerpoint/2010/main">
+        <mc:Choice Requires="p14">
           <p:contentPart p14:bwMode="auto" r:id="rId29">
             <p14:nvContentPartPr>
               <p14:cNvPr id="79" name="Ink 78">
@@ -8249,7 +8250,7 @@
             </p14:xfrm>
           </p:contentPart>
         </mc:Choice>
-        <mc:Fallback>
+        <mc:Fallback xmlns="">
           <p:pic>
             <p:nvPicPr>
               <p:cNvPr id="79" name="Ink 78">
@@ -8280,8 +8281,8 @@
           </p:pic>
         </mc:Fallback>
       </mc:AlternateContent>
-      <mc:AlternateContent xmlns:mc="http://schemas.openxmlformats.org/markup-compatibility/2006">
-        <mc:Choice xmlns:p14="http://schemas.microsoft.com/office/powerpoint/2010/main" Requires="p14">
+      <mc:AlternateContent xmlns:mc="http://schemas.openxmlformats.org/markup-compatibility/2006" xmlns:p14="http://schemas.microsoft.com/office/powerpoint/2010/main">
+        <mc:Choice Requires="p14">
           <p:contentPart p14:bwMode="auto" r:id="rId30">
             <p14:nvContentPartPr>
               <p14:cNvPr id="80" name="Ink 79">
@@ -8300,7 +8301,7 @@
             </p14:xfrm>
           </p:contentPart>
         </mc:Choice>
-        <mc:Fallback>
+        <mc:Fallback xmlns="">
           <p:pic>
             <p:nvPicPr>
               <p:cNvPr id="80" name="Ink 79">
@@ -8331,8 +8332,8 @@
           </p:pic>
         </mc:Fallback>
       </mc:AlternateContent>
-      <mc:AlternateContent xmlns:mc="http://schemas.openxmlformats.org/markup-compatibility/2006">
-        <mc:Choice xmlns:p14="http://schemas.microsoft.com/office/powerpoint/2010/main" Requires="p14">
+      <mc:AlternateContent xmlns:mc="http://schemas.openxmlformats.org/markup-compatibility/2006" xmlns:p14="http://schemas.microsoft.com/office/powerpoint/2010/main">
+        <mc:Choice Requires="p14">
           <p:contentPart p14:bwMode="auto" r:id="rId31">
             <p14:nvContentPartPr>
               <p14:cNvPr id="81" name="Ink 80">
@@ -8351,7 +8352,7 @@
             </p14:xfrm>
           </p:contentPart>
         </mc:Choice>
-        <mc:Fallback>
+        <mc:Fallback xmlns="">
           <p:pic>
             <p:nvPicPr>
               <p:cNvPr id="81" name="Ink 80">
@@ -8382,8 +8383,8 @@
           </p:pic>
         </mc:Fallback>
       </mc:AlternateContent>
-      <mc:AlternateContent xmlns:mc="http://schemas.openxmlformats.org/markup-compatibility/2006">
-        <mc:Choice xmlns:p14="http://schemas.microsoft.com/office/powerpoint/2010/main" Requires="p14">
+      <mc:AlternateContent xmlns:mc="http://schemas.openxmlformats.org/markup-compatibility/2006" xmlns:p14="http://schemas.microsoft.com/office/powerpoint/2010/main">
+        <mc:Choice Requires="p14">
           <p:contentPart p14:bwMode="auto" r:id="rId32">
             <p14:nvContentPartPr>
               <p14:cNvPr id="82" name="Ink 81">
@@ -8402,7 +8403,7 @@
             </p14:xfrm>
           </p:contentPart>
         </mc:Choice>
-        <mc:Fallback>
+        <mc:Fallback xmlns="">
           <p:pic>
             <p:nvPicPr>
               <p:cNvPr id="82" name="Ink 81">
@@ -8433,8 +8434,8 @@
           </p:pic>
         </mc:Fallback>
       </mc:AlternateContent>
-      <mc:AlternateContent xmlns:mc="http://schemas.openxmlformats.org/markup-compatibility/2006">
-        <mc:Choice xmlns:p14="http://schemas.microsoft.com/office/powerpoint/2010/main" Requires="p14">
+      <mc:AlternateContent xmlns:mc="http://schemas.openxmlformats.org/markup-compatibility/2006" xmlns:p14="http://schemas.microsoft.com/office/powerpoint/2010/main">
+        <mc:Choice Requires="p14">
           <p:contentPart p14:bwMode="auto" r:id="rId33">
             <p14:nvContentPartPr>
               <p14:cNvPr id="83" name="Ink 82">
@@ -8453,7 +8454,7 @@
             </p14:xfrm>
           </p:contentPart>
         </mc:Choice>
-        <mc:Fallback>
+        <mc:Fallback xmlns="">
           <p:pic>
             <p:nvPicPr>
               <p:cNvPr id="83" name="Ink 82">
@@ -8484,8 +8485,8 @@
           </p:pic>
         </mc:Fallback>
       </mc:AlternateContent>
-      <mc:AlternateContent xmlns:mc="http://schemas.openxmlformats.org/markup-compatibility/2006">
-        <mc:Choice xmlns:p14="http://schemas.microsoft.com/office/powerpoint/2010/main" Requires="p14">
+      <mc:AlternateContent xmlns:mc="http://schemas.openxmlformats.org/markup-compatibility/2006" xmlns:p14="http://schemas.microsoft.com/office/powerpoint/2010/main">
+        <mc:Choice Requires="p14">
           <p:contentPart p14:bwMode="auto" r:id="rId34">
             <p14:nvContentPartPr>
               <p14:cNvPr id="84" name="Ink 83">
@@ -8504,7 +8505,7 @@
             </p14:xfrm>
           </p:contentPart>
         </mc:Choice>
-        <mc:Fallback>
+        <mc:Fallback xmlns="">
           <p:pic>
             <p:nvPicPr>
               <p:cNvPr id="84" name="Ink 83">
@@ -8535,8 +8536,8 @@
           </p:pic>
         </mc:Fallback>
       </mc:AlternateContent>
-      <mc:AlternateContent xmlns:mc="http://schemas.openxmlformats.org/markup-compatibility/2006">
-        <mc:Choice xmlns:p14="http://schemas.microsoft.com/office/powerpoint/2010/main" Requires="p14">
+      <mc:AlternateContent xmlns:mc="http://schemas.openxmlformats.org/markup-compatibility/2006" xmlns:p14="http://schemas.microsoft.com/office/powerpoint/2010/main">
+        <mc:Choice Requires="p14">
           <p:contentPart p14:bwMode="auto" r:id="rId35">
             <p14:nvContentPartPr>
               <p14:cNvPr id="85" name="Ink 84">
@@ -8555,7 +8556,7 @@
             </p14:xfrm>
           </p:contentPart>
         </mc:Choice>
-        <mc:Fallback>
+        <mc:Fallback xmlns="">
           <p:pic>
             <p:nvPicPr>
               <p:cNvPr id="85" name="Ink 84">
@@ -9085,6 +9086,1261 @@
     <p:extLst>
       <p:ext uri="{BB962C8B-B14F-4D97-AF65-F5344CB8AC3E}">
         <p14:creationId xmlns:p14="http://schemas.microsoft.com/office/powerpoint/2010/main" val="365016395"/>
+      </p:ext>
+    </p:extLst>
+  </p:cSld>
+  <p:clrMapOvr>
+    <a:masterClrMapping/>
+  </p:clrMapOvr>
+</p:sld>
+</file>
+
+<file path=ppt/slides/slide4.xml><?xml version="1.0" encoding="utf-8"?>
+<p:sld xmlns:a="http://schemas.openxmlformats.org/drawingml/2006/main" xmlns:r="http://schemas.openxmlformats.org/officeDocument/2006/relationships" xmlns:p="http://schemas.openxmlformats.org/presentationml/2006/main">
+  <p:cSld>
+    <p:spTree>
+      <p:nvGrpSpPr>
+        <p:cNvPr id="1" name=""/>
+        <p:cNvGrpSpPr/>
+        <p:nvPr/>
+      </p:nvGrpSpPr>
+      <p:grpSpPr>
+        <a:xfrm>
+          <a:off x="0" y="0"/>
+          <a:ext cx="0" cy="0"/>
+          <a:chOff x="0" y="0"/>
+          <a:chExt cx="0" cy="0"/>
+        </a:xfrm>
+      </p:grpSpPr>
+      <p:sp>
+        <p:nvSpPr>
+          <p:cNvPr id="4" name="Rectangle 3">
+            <a:extLst>
+              <a:ext uri="{FF2B5EF4-FFF2-40B4-BE49-F238E27FC236}">
+                <a16:creationId xmlns:a16="http://schemas.microsoft.com/office/drawing/2014/main" id="{A458BBB6-267C-ADE2-D8AA-08F9EDAF69A2}"/>
+              </a:ext>
+            </a:extLst>
+          </p:cNvPr>
+          <p:cNvSpPr/>
+          <p:nvPr/>
+        </p:nvSpPr>
+        <p:spPr>
+          <a:xfrm>
+            <a:off x="2513569" y="1687912"/>
+            <a:ext cx="2316516" cy="2178032"/>
+          </a:xfrm>
+          <a:prstGeom prst="rect">
+            <a:avLst/>
+          </a:prstGeom>
+          <a:solidFill>
+            <a:schemeClr val="bg1"/>
+          </a:solidFill>
+        </p:spPr>
+        <p:style>
+          <a:lnRef idx="2">
+            <a:schemeClr val="accent1">
+              <a:shade val="15000"/>
+            </a:schemeClr>
+          </a:lnRef>
+          <a:fillRef idx="1">
+            <a:schemeClr val="accent1"/>
+          </a:fillRef>
+          <a:effectRef idx="0">
+            <a:schemeClr val="accent1"/>
+          </a:effectRef>
+          <a:fontRef idx="minor">
+            <a:schemeClr val="lt1"/>
+          </a:fontRef>
+        </p:style>
+        <p:txBody>
+          <a:bodyPr rtlCol="0" anchor="ctr"/>
+          <a:lstStyle/>
+          <a:p>
+            <a:pPr algn="ctr"/>
+            <a:endParaRPr lang="en-US" dirty="0"/>
+          </a:p>
+        </p:txBody>
+      </p:sp>
+      <p:sp>
+        <p:nvSpPr>
+          <p:cNvPr id="5" name="Right Triangle 4">
+            <a:extLst>
+              <a:ext uri="{FF2B5EF4-FFF2-40B4-BE49-F238E27FC236}">
+                <a16:creationId xmlns:a16="http://schemas.microsoft.com/office/drawing/2014/main" id="{8AC4242D-A0F0-5703-0D27-144B3B5CC521}"/>
+              </a:ext>
+            </a:extLst>
+          </p:cNvPr>
+          <p:cNvSpPr/>
+          <p:nvPr/>
+        </p:nvSpPr>
+        <p:spPr>
+          <a:xfrm rot="10800000">
+            <a:off x="3669173" y="1687910"/>
+            <a:ext cx="1160911" cy="1090013"/>
+          </a:xfrm>
+          <a:prstGeom prst="rtTriangle">
+            <a:avLst/>
+          </a:prstGeom>
+          <a:solidFill>
+            <a:schemeClr val="bg2">
+              <a:lumMod val="90000"/>
+            </a:schemeClr>
+          </a:solidFill>
+        </p:spPr>
+        <p:style>
+          <a:lnRef idx="2">
+            <a:schemeClr val="accent1">
+              <a:shade val="15000"/>
+            </a:schemeClr>
+          </a:lnRef>
+          <a:fillRef idx="1">
+            <a:schemeClr val="accent1"/>
+          </a:fillRef>
+          <a:effectRef idx="0">
+            <a:schemeClr val="accent1"/>
+          </a:effectRef>
+          <a:fontRef idx="minor">
+            <a:schemeClr val="lt1"/>
+          </a:fontRef>
+        </p:style>
+        <p:txBody>
+          <a:bodyPr rtlCol="0" anchor="ctr"/>
+          <a:lstStyle/>
+          <a:p>
+            <a:pPr algn="ctr"/>
+            <a:endParaRPr lang="en-US"/>
+          </a:p>
+        </p:txBody>
+      </p:sp>
+      <p:sp>
+        <p:nvSpPr>
+          <p:cNvPr id="7" name="TextBox 6">
+            <a:extLst>
+              <a:ext uri="{FF2B5EF4-FFF2-40B4-BE49-F238E27FC236}">
+                <a16:creationId xmlns:a16="http://schemas.microsoft.com/office/drawing/2014/main" id="{E6FC7554-5A1C-BEC0-1F29-A60BBE1A6627}"/>
+              </a:ext>
+            </a:extLst>
+          </p:cNvPr>
+          <p:cNvSpPr txBox="1"/>
+          <p:nvPr/>
+        </p:nvSpPr>
+        <p:spPr>
+          <a:xfrm>
+            <a:off x="2714555" y="2584267"/>
+            <a:ext cx="287258" cy="369332"/>
+          </a:xfrm>
+          <a:prstGeom prst="rect">
+            <a:avLst/>
+          </a:prstGeom>
+          <a:noFill/>
+        </p:spPr>
+        <p:txBody>
+          <a:bodyPr wrap="none" rtlCol="0">
+            <a:spAutoFit/>
+          </a:bodyPr>
+          <a:lstStyle/>
+          <a:p>
+            <a:r>
+              <a:rPr lang="en-US" dirty="0"/>
+              <a:t>x</a:t>
+            </a:r>
+          </a:p>
+        </p:txBody>
+      </p:sp>
+      <p:sp>
+        <p:nvSpPr>
+          <p:cNvPr id="8" name="TextBox 7">
+            <a:extLst>
+              <a:ext uri="{FF2B5EF4-FFF2-40B4-BE49-F238E27FC236}">
+                <a16:creationId xmlns:a16="http://schemas.microsoft.com/office/drawing/2014/main" id="{3BAF7B82-5631-0F3D-9446-707789138065}"/>
+              </a:ext>
+            </a:extLst>
+          </p:cNvPr>
+          <p:cNvSpPr txBox="1"/>
+          <p:nvPr/>
+        </p:nvSpPr>
+        <p:spPr>
+          <a:xfrm>
+            <a:off x="4249628" y="1687910"/>
+            <a:ext cx="287258" cy="369332"/>
+          </a:xfrm>
+          <a:prstGeom prst="rect">
+            <a:avLst/>
+          </a:prstGeom>
+          <a:noFill/>
+        </p:spPr>
+        <p:txBody>
+          <a:bodyPr wrap="none" rtlCol="0">
+            <a:spAutoFit/>
+          </a:bodyPr>
+          <a:lstStyle/>
+          <a:p>
+            <a:r>
+              <a:rPr lang="en-US" dirty="0"/>
+              <a:t>x</a:t>
+            </a:r>
+          </a:p>
+        </p:txBody>
+      </p:sp>
+      <p:sp>
+        <p:nvSpPr>
+          <p:cNvPr id="9" name="TextBox 8">
+            <a:extLst>
+              <a:ext uri="{FF2B5EF4-FFF2-40B4-BE49-F238E27FC236}">
+                <a16:creationId xmlns:a16="http://schemas.microsoft.com/office/drawing/2014/main" id="{18F3264D-6C9A-B5B3-1434-B22B003D525F}"/>
+              </a:ext>
+            </a:extLst>
+          </p:cNvPr>
+          <p:cNvSpPr txBox="1"/>
+          <p:nvPr/>
+        </p:nvSpPr>
+        <p:spPr>
+          <a:xfrm>
+            <a:off x="3528198" y="3317438"/>
+            <a:ext cx="287258" cy="369332"/>
+          </a:xfrm>
+          <a:prstGeom prst="rect">
+            <a:avLst/>
+          </a:prstGeom>
+          <a:noFill/>
+        </p:spPr>
+        <p:txBody>
+          <a:bodyPr wrap="none" rtlCol="0">
+            <a:spAutoFit/>
+          </a:bodyPr>
+          <a:lstStyle/>
+          <a:p>
+            <a:r>
+              <a:rPr lang="en-US" dirty="0"/>
+              <a:t>x</a:t>
+            </a:r>
+          </a:p>
+        </p:txBody>
+      </p:sp>
+      <p:sp>
+        <p:nvSpPr>
+          <p:cNvPr id="10" name="TextBox 9">
+            <a:extLst>
+              <a:ext uri="{FF2B5EF4-FFF2-40B4-BE49-F238E27FC236}">
+                <a16:creationId xmlns:a16="http://schemas.microsoft.com/office/drawing/2014/main" id="{B162C0AA-B5FC-711D-53E9-D35C6F83234C}"/>
+              </a:ext>
+            </a:extLst>
+          </p:cNvPr>
+          <p:cNvSpPr txBox="1"/>
+          <p:nvPr/>
+        </p:nvSpPr>
+        <p:spPr>
+          <a:xfrm>
+            <a:off x="4399198" y="2057242"/>
+            <a:ext cx="287258" cy="369332"/>
+          </a:xfrm>
+          <a:prstGeom prst="rect">
+            <a:avLst/>
+          </a:prstGeom>
+          <a:noFill/>
+        </p:spPr>
+        <p:txBody>
+          <a:bodyPr wrap="none" rtlCol="0">
+            <a:spAutoFit/>
+          </a:bodyPr>
+          <a:lstStyle/>
+          <a:p>
+            <a:r>
+              <a:rPr lang="en-US" dirty="0"/>
+              <a:t>x</a:t>
+            </a:r>
+          </a:p>
+        </p:txBody>
+      </p:sp>
+      <p:sp>
+        <p:nvSpPr>
+          <p:cNvPr id="11" name="TextBox 10">
+            <a:extLst>
+              <a:ext uri="{FF2B5EF4-FFF2-40B4-BE49-F238E27FC236}">
+                <a16:creationId xmlns:a16="http://schemas.microsoft.com/office/drawing/2014/main" id="{B2C4E1DD-52CB-0E15-E7DE-28281B229A32}"/>
+              </a:ext>
+            </a:extLst>
+          </p:cNvPr>
+          <p:cNvSpPr txBox="1"/>
+          <p:nvPr/>
+        </p:nvSpPr>
+        <p:spPr>
+          <a:xfrm>
+            <a:off x="4105999" y="2768933"/>
+            <a:ext cx="287258" cy="369332"/>
+          </a:xfrm>
+          <a:prstGeom prst="rect">
+            <a:avLst/>
+          </a:prstGeom>
+          <a:noFill/>
+        </p:spPr>
+        <p:txBody>
+          <a:bodyPr wrap="none" rtlCol="0">
+            <a:spAutoFit/>
+          </a:bodyPr>
+          <a:lstStyle/>
+          <a:p>
+            <a:r>
+              <a:rPr lang="en-US" dirty="0"/>
+              <a:t>x</a:t>
+            </a:r>
+          </a:p>
+        </p:txBody>
+      </p:sp>
+      <p:sp>
+        <p:nvSpPr>
+          <p:cNvPr id="12" name="TextBox 11">
+            <a:extLst>
+              <a:ext uri="{FF2B5EF4-FFF2-40B4-BE49-F238E27FC236}">
+                <a16:creationId xmlns:a16="http://schemas.microsoft.com/office/drawing/2014/main" id="{4C51EF5D-3F34-2DA4-9D3E-427EBBF53EC6}"/>
+              </a:ext>
+            </a:extLst>
+          </p:cNvPr>
+          <p:cNvSpPr txBox="1"/>
+          <p:nvPr/>
+        </p:nvSpPr>
+        <p:spPr>
+          <a:xfrm>
+            <a:off x="3235317" y="2030512"/>
+            <a:ext cx="287258" cy="369332"/>
+          </a:xfrm>
+          <a:prstGeom prst="rect">
+            <a:avLst/>
+          </a:prstGeom>
+          <a:noFill/>
+        </p:spPr>
+        <p:txBody>
+          <a:bodyPr wrap="none" rtlCol="0">
+            <a:spAutoFit/>
+          </a:bodyPr>
+          <a:lstStyle/>
+          <a:p>
+            <a:r>
+              <a:rPr lang="en-US" dirty="0"/>
+              <a:t>x</a:t>
+            </a:r>
+          </a:p>
+        </p:txBody>
+      </p:sp>
+      <p:cxnSp>
+        <p:nvCxnSpPr>
+          <p:cNvPr id="14" name="Straight Connector 13">
+            <a:extLst>
+              <a:ext uri="{FF2B5EF4-FFF2-40B4-BE49-F238E27FC236}">
+                <a16:creationId xmlns:a16="http://schemas.microsoft.com/office/drawing/2014/main" id="{AF8C026B-558F-7859-995C-BF5A45BCA245}"/>
+              </a:ext>
+            </a:extLst>
+          </p:cNvPr>
+          <p:cNvCxnSpPr>
+            <a:stCxn id="8" idx="2"/>
+          </p:cNvCxnSpPr>
+          <p:nvPr/>
+        </p:nvCxnSpPr>
+        <p:spPr>
+          <a:xfrm>
+            <a:off x="4393257" y="2057242"/>
+            <a:ext cx="0" cy="1808702"/>
+          </a:xfrm>
+          <a:prstGeom prst="line">
+            <a:avLst/>
+          </a:prstGeom>
+          <a:ln>
+            <a:prstDash val="dash"/>
+          </a:ln>
+        </p:spPr>
+        <p:style>
+          <a:lnRef idx="2">
+            <a:schemeClr val="accent1"/>
+          </a:lnRef>
+          <a:fillRef idx="0">
+            <a:schemeClr val="accent1"/>
+          </a:fillRef>
+          <a:effectRef idx="1">
+            <a:schemeClr val="accent1"/>
+          </a:effectRef>
+          <a:fontRef idx="minor">
+            <a:schemeClr val="tx1"/>
+          </a:fontRef>
+        </p:style>
+      </p:cxnSp>
+      <p:cxnSp>
+        <p:nvCxnSpPr>
+          <p:cNvPr id="15" name="Straight Connector 14">
+            <a:extLst>
+              <a:ext uri="{FF2B5EF4-FFF2-40B4-BE49-F238E27FC236}">
+                <a16:creationId xmlns:a16="http://schemas.microsoft.com/office/drawing/2014/main" id="{C3733EC5-07FF-9457-CF39-FA70274EA1E9}"/>
+              </a:ext>
+            </a:extLst>
+          </p:cNvPr>
+          <p:cNvCxnSpPr>
+            <a:cxnSpLocks/>
+            <a:stCxn id="10" idx="2"/>
+          </p:cNvCxnSpPr>
+          <p:nvPr/>
+        </p:nvCxnSpPr>
+        <p:spPr>
+          <a:xfrm>
+            <a:off x="4542827" y="2426574"/>
+            <a:ext cx="0" cy="1439370"/>
+          </a:xfrm>
+          <a:prstGeom prst="line">
+            <a:avLst/>
+          </a:prstGeom>
+          <a:ln>
+            <a:prstDash val="dash"/>
+          </a:ln>
+        </p:spPr>
+        <p:style>
+          <a:lnRef idx="2">
+            <a:schemeClr val="accent1"/>
+          </a:lnRef>
+          <a:fillRef idx="0">
+            <a:schemeClr val="accent1"/>
+          </a:fillRef>
+          <a:effectRef idx="1">
+            <a:schemeClr val="accent1"/>
+          </a:effectRef>
+          <a:fontRef idx="minor">
+            <a:schemeClr val="tx1"/>
+          </a:fontRef>
+        </p:style>
+      </p:cxnSp>
+      <p:cxnSp>
+        <p:nvCxnSpPr>
+          <p:cNvPr id="18" name="Straight Connector 17">
+            <a:extLst>
+              <a:ext uri="{FF2B5EF4-FFF2-40B4-BE49-F238E27FC236}">
+                <a16:creationId xmlns:a16="http://schemas.microsoft.com/office/drawing/2014/main" id="{0FA9B75D-E3E0-6460-9181-A3CA4222E04D}"/>
+              </a:ext>
+            </a:extLst>
+          </p:cNvPr>
+          <p:cNvCxnSpPr>
+            <a:cxnSpLocks/>
+            <a:stCxn id="11" idx="2"/>
+          </p:cNvCxnSpPr>
+          <p:nvPr/>
+        </p:nvCxnSpPr>
+        <p:spPr>
+          <a:xfrm>
+            <a:off x="4249628" y="3138265"/>
+            <a:ext cx="0" cy="727679"/>
+          </a:xfrm>
+          <a:prstGeom prst="line">
+            <a:avLst/>
+          </a:prstGeom>
+        </p:spPr>
+        <p:style>
+          <a:lnRef idx="2">
+            <a:schemeClr val="accent1"/>
+          </a:lnRef>
+          <a:fillRef idx="0">
+            <a:schemeClr val="accent1"/>
+          </a:fillRef>
+          <a:effectRef idx="1">
+            <a:schemeClr val="accent1"/>
+          </a:effectRef>
+          <a:fontRef idx="minor">
+            <a:schemeClr val="tx1"/>
+          </a:fontRef>
+        </p:style>
+      </p:cxnSp>
+      <p:cxnSp>
+        <p:nvCxnSpPr>
+          <p:cNvPr id="21" name="Straight Connector 20">
+            <a:extLst>
+              <a:ext uri="{FF2B5EF4-FFF2-40B4-BE49-F238E27FC236}">
+                <a16:creationId xmlns:a16="http://schemas.microsoft.com/office/drawing/2014/main" id="{620865D7-7E66-2BE7-16C3-C282ECFC4529}"/>
+              </a:ext>
+            </a:extLst>
+          </p:cNvPr>
+          <p:cNvCxnSpPr>
+            <a:cxnSpLocks/>
+            <a:stCxn id="12" idx="2"/>
+          </p:cNvCxnSpPr>
+          <p:nvPr/>
+        </p:nvCxnSpPr>
+        <p:spPr>
+          <a:xfrm>
+            <a:off x="3378946" y="2399844"/>
+            <a:ext cx="0" cy="1466100"/>
+          </a:xfrm>
+          <a:prstGeom prst="line">
+            <a:avLst/>
+          </a:prstGeom>
+        </p:spPr>
+        <p:style>
+          <a:lnRef idx="2">
+            <a:schemeClr val="accent1"/>
+          </a:lnRef>
+          <a:fillRef idx="0">
+            <a:schemeClr val="accent1"/>
+          </a:fillRef>
+          <a:effectRef idx="1">
+            <a:schemeClr val="accent1"/>
+          </a:effectRef>
+          <a:fontRef idx="minor">
+            <a:schemeClr val="tx1"/>
+          </a:fontRef>
+        </p:style>
+      </p:cxnSp>
+      <p:cxnSp>
+        <p:nvCxnSpPr>
+          <p:cNvPr id="23" name="Straight Connector 22">
+            <a:extLst>
+              <a:ext uri="{FF2B5EF4-FFF2-40B4-BE49-F238E27FC236}">
+                <a16:creationId xmlns:a16="http://schemas.microsoft.com/office/drawing/2014/main" id="{105E48C7-C22A-3FDA-870A-3CB25F4F4AD0}"/>
+              </a:ext>
+            </a:extLst>
+          </p:cNvPr>
+          <p:cNvCxnSpPr>
+            <a:cxnSpLocks/>
+            <a:stCxn id="9" idx="2"/>
+            <a:endCxn id="4" idx="2"/>
+          </p:cNvCxnSpPr>
+          <p:nvPr/>
+        </p:nvCxnSpPr>
+        <p:spPr>
+          <a:xfrm>
+            <a:off x="3671827" y="3686770"/>
+            <a:ext cx="0" cy="179174"/>
+          </a:xfrm>
+          <a:prstGeom prst="line">
+            <a:avLst/>
+          </a:prstGeom>
+        </p:spPr>
+        <p:style>
+          <a:lnRef idx="2">
+            <a:schemeClr val="accent1"/>
+          </a:lnRef>
+          <a:fillRef idx="0">
+            <a:schemeClr val="accent1"/>
+          </a:fillRef>
+          <a:effectRef idx="1">
+            <a:schemeClr val="accent1"/>
+          </a:effectRef>
+          <a:fontRef idx="minor">
+            <a:schemeClr val="tx1"/>
+          </a:fontRef>
+        </p:style>
+      </p:cxnSp>
+      <p:cxnSp>
+        <p:nvCxnSpPr>
+          <p:cNvPr id="26" name="Straight Connector 25">
+            <a:extLst>
+              <a:ext uri="{FF2B5EF4-FFF2-40B4-BE49-F238E27FC236}">
+                <a16:creationId xmlns:a16="http://schemas.microsoft.com/office/drawing/2014/main" id="{2D4EECFE-B7DC-4A23-5D09-A4F833F85B79}"/>
+              </a:ext>
+            </a:extLst>
+          </p:cNvPr>
+          <p:cNvCxnSpPr>
+            <a:cxnSpLocks/>
+            <a:stCxn id="7" idx="2"/>
+          </p:cNvCxnSpPr>
+          <p:nvPr/>
+        </p:nvCxnSpPr>
+        <p:spPr>
+          <a:xfrm>
+            <a:off x="2858184" y="2953599"/>
+            <a:ext cx="0" cy="912345"/>
+          </a:xfrm>
+          <a:prstGeom prst="line">
+            <a:avLst/>
+          </a:prstGeom>
+        </p:spPr>
+        <p:style>
+          <a:lnRef idx="2">
+            <a:schemeClr val="accent1"/>
+          </a:lnRef>
+          <a:fillRef idx="0">
+            <a:schemeClr val="accent1"/>
+          </a:fillRef>
+          <a:effectRef idx="1">
+            <a:schemeClr val="accent1"/>
+          </a:effectRef>
+          <a:fontRef idx="minor">
+            <a:schemeClr val="tx1"/>
+          </a:fontRef>
+        </p:style>
+      </p:cxnSp>
+      <p:sp>
+        <p:nvSpPr>
+          <p:cNvPr id="31" name="Rectangle 30">
+            <a:extLst>
+              <a:ext uri="{FF2B5EF4-FFF2-40B4-BE49-F238E27FC236}">
+                <a16:creationId xmlns:a16="http://schemas.microsoft.com/office/drawing/2014/main" id="{01502561-F160-BCFD-3904-C7C60EFBA312}"/>
+              </a:ext>
+            </a:extLst>
+          </p:cNvPr>
+          <p:cNvSpPr/>
+          <p:nvPr/>
+        </p:nvSpPr>
+        <p:spPr>
+          <a:xfrm>
+            <a:off x="7118600" y="1688908"/>
+            <a:ext cx="2316516" cy="2178032"/>
+          </a:xfrm>
+          <a:prstGeom prst="rect">
+            <a:avLst/>
+          </a:prstGeom>
+          <a:solidFill>
+            <a:schemeClr val="bg1"/>
+          </a:solidFill>
+        </p:spPr>
+        <p:style>
+          <a:lnRef idx="2">
+            <a:schemeClr val="accent1">
+              <a:shade val="15000"/>
+            </a:schemeClr>
+          </a:lnRef>
+          <a:fillRef idx="1">
+            <a:schemeClr val="accent1"/>
+          </a:fillRef>
+          <a:effectRef idx="0">
+            <a:schemeClr val="accent1"/>
+          </a:effectRef>
+          <a:fontRef idx="minor">
+            <a:schemeClr val="lt1"/>
+          </a:fontRef>
+        </p:style>
+        <p:txBody>
+          <a:bodyPr rtlCol="0" anchor="ctr"/>
+          <a:lstStyle/>
+          <a:p>
+            <a:pPr algn="ctr"/>
+            <a:endParaRPr lang="en-US" dirty="0"/>
+          </a:p>
+        </p:txBody>
+      </p:sp>
+      <p:sp>
+        <p:nvSpPr>
+          <p:cNvPr id="32" name="Right Triangle 31">
+            <a:extLst>
+              <a:ext uri="{FF2B5EF4-FFF2-40B4-BE49-F238E27FC236}">
+                <a16:creationId xmlns:a16="http://schemas.microsoft.com/office/drawing/2014/main" id="{A189E3A8-4798-6F9F-8631-94F85C04BB47}"/>
+              </a:ext>
+            </a:extLst>
+          </p:cNvPr>
+          <p:cNvSpPr/>
+          <p:nvPr/>
+        </p:nvSpPr>
+        <p:spPr>
+          <a:xfrm rot="10800000">
+            <a:off x="8274204" y="1688906"/>
+            <a:ext cx="1160911" cy="1090013"/>
+          </a:xfrm>
+          <a:prstGeom prst="rtTriangle">
+            <a:avLst/>
+          </a:prstGeom>
+          <a:solidFill>
+            <a:schemeClr val="bg2">
+              <a:lumMod val="90000"/>
+            </a:schemeClr>
+          </a:solidFill>
+        </p:spPr>
+        <p:style>
+          <a:lnRef idx="2">
+            <a:schemeClr val="accent1">
+              <a:shade val="15000"/>
+            </a:schemeClr>
+          </a:lnRef>
+          <a:fillRef idx="1">
+            <a:schemeClr val="accent1"/>
+          </a:fillRef>
+          <a:effectRef idx="0">
+            <a:schemeClr val="accent1"/>
+          </a:effectRef>
+          <a:fontRef idx="minor">
+            <a:schemeClr val="lt1"/>
+          </a:fontRef>
+        </p:style>
+        <p:txBody>
+          <a:bodyPr rtlCol="0" anchor="ctr"/>
+          <a:lstStyle/>
+          <a:p>
+            <a:pPr algn="ctr"/>
+            <a:endParaRPr lang="en-US"/>
+          </a:p>
+        </p:txBody>
+      </p:sp>
+      <p:sp>
+        <p:nvSpPr>
+          <p:cNvPr id="33" name="TextBox 32">
+            <a:extLst>
+              <a:ext uri="{FF2B5EF4-FFF2-40B4-BE49-F238E27FC236}">
+                <a16:creationId xmlns:a16="http://schemas.microsoft.com/office/drawing/2014/main" id="{865F05D3-8091-D62A-F1BA-B721F8B9B878}"/>
+              </a:ext>
+            </a:extLst>
+          </p:cNvPr>
+          <p:cNvSpPr txBox="1"/>
+          <p:nvPr/>
+        </p:nvSpPr>
+        <p:spPr>
+          <a:xfrm>
+            <a:off x="7319586" y="2585263"/>
+            <a:ext cx="287258" cy="369332"/>
+          </a:xfrm>
+          <a:prstGeom prst="rect">
+            <a:avLst/>
+          </a:prstGeom>
+          <a:noFill/>
+        </p:spPr>
+        <p:txBody>
+          <a:bodyPr wrap="none" rtlCol="0">
+            <a:spAutoFit/>
+          </a:bodyPr>
+          <a:lstStyle/>
+          <a:p>
+            <a:r>
+              <a:rPr lang="en-US" dirty="0"/>
+              <a:t>x</a:t>
+            </a:r>
+          </a:p>
+        </p:txBody>
+      </p:sp>
+      <p:sp>
+        <p:nvSpPr>
+          <p:cNvPr id="34" name="TextBox 33">
+            <a:extLst>
+              <a:ext uri="{FF2B5EF4-FFF2-40B4-BE49-F238E27FC236}">
+                <a16:creationId xmlns:a16="http://schemas.microsoft.com/office/drawing/2014/main" id="{C3439973-3EC7-C135-31C1-F982BDB20135}"/>
+              </a:ext>
+            </a:extLst>
+          </p:cNvPr>
+          <p:cNvSpPr txBox="1"/>
+          <p:nvPr/>
+        </p:nvSpPr>
+        <p:spPr>
+          <a:xfrm>
+            <a:off x="8854659" y="1688906"/>
+            <a:ext cx="287258" cy="369332"/>
+          </a:xfrm>
+          <a:prstGeom prst="rect">
+            <a:avLst/>
+          </a:prstGeom>
+          <a:noFill/>
+        </p:spPr>
+        <p:txBody>
+          <a:bodyPr wrap="none" rtlCol="0">
+            <a:spAutoFit/>
+          </a:bodyPr>
+          <a:lstStyle/>
+          <a:p>
+            <a:r>
+              <a:rPr lang="en-US" dirty="0"/>
+              <a:t>x</a:t>
+            </a:r>
+          </a:p>
+        </p:txBody>
+      </p:sp>
+      <p:sp>
+        <p:nvSpPr>
+          <p:cNvPr id="35" name="TextBox 34">
+            <a:extLst>
+              <a:ext uri="{FF2B5EF4-FFF2-40B4-BE49-F238E27FC236}">
+                <a16:creationId xmlns:a16="http://schemas.microsoft.com/office/drawing/2014/main" id="{7B4D86FC-3CAB-4AC8-8CF5-BE1E95391B7E}"/>
+              </a:ext>
+            </a:extLst>
+          </p:cNvPr>
+          <p:cNvSpPr txBox="1"/>
+          <p:nvPr/>
+        </p:nvSpPr>
+        <p:spPr>
+          <a:xfrm>
+            <a:off x="8133229" y="3318434"/>
+            <a:ext cx="287258" cy="369332"/>
+          </a:xfrm>
+          <a:prstGeom prst="rect">
+            <a:avLst/>
+          </a:prstGeom>
+          <a:noFill/>
+        </p:spPr>
+        <p:txBody>
+          <a:bodyPr wrap="none" rtlCol="0">
+            <a:spAutoFit/>
+          </a:bodyPr>
+          <a:lstStyle/>
+          <a:p>
+            <a:r>
+              <a:rPr lang="en-US" dirty="0"/>
+              <a:t>x</a:t>
+            </a:r>
+          </a:p>
+        </p:txBody>
+      </p:sp>
+      <p:sp>
+        <p:nvSpPr>
+          <p:cNvPr id="36" name="TextBox 35">
+            <a:extLst>
+              <a:ext uri="{FF2B5EF4-FFF2-40B4-BE49-F238E27FC236}">
+                <a16:creationId xmlns:a16="http://schemas.microsoft.com/office/drawing/2014/main" id="{D66459FD-DBE3-9C76-9C61-D4D122D5244D}"/>
+              </a:ext>
+            </a:extLst>
+          </p:cNvPr>
+          <p:cNvSpPr txBox="1"/>
+          <p:nvPr/>
+        </p:nvSpPr>
+        <p:spPr>
+          <a:xfrm>
+            <a:off x="9004229" y="2058238"/>
+            <a:ext cx="287258" cy="369332"/>
+          </a:xfrm>
+          <a:prstGeom prst="rect">
+            <a:avLst/>
+          </a:prstGeom>
+          <a:noFill/>
+        </p:spPr>
+        <p:txBody>
+          <a:bodyPr wrap="none" rtlCol="0">
+            <a:spAutoFit/>
+          </a:bodyPr>
+          <a:lstStyle/>
+          <a:p>
+            <a:r>
+              <a:rPr lang="en-US" dirty="0"/>
+              <a:t>x</a:t>
+            </a:r>
+          </a:p>
+        </p:txBody>
+      </p:sp>
+      <p:sp>
+        <p:nvSpPr>
+          <p:cNvPr id="37" name="TextBox 36">
+            <a:extLst>
+              <a:ext uri="{FF2B5EF4-FFF2-40B4-BE49-F238E27FC236}">
+                <a16:creationId xmlns:a16="http://schemas.microsoft.com/office/drawing/2014/main" id="{E66C049D-BBA6-C433-0FD3-702514299979}"/>
+              </a:ext>
+            </a:extLst>
+          </p:cNvPr>
+          <p:cNvSpPr txBox="1"/>
+          <p:nvPr/>
+        </p:nvSpPr>
+        <p:spPr>
+          <a:xfrm>
+            <a:off x="8711030" y="2769929"/>
+            <a:ext cx="287258" cy="369332"/>
+          </a:xfrm>
+          <a:prstGeom prst="rect">
+            <a:avLst/>
+          </a:prstGeom>
+          <a:noFill/>
+        </p:spPr>
+        <p:txBody>
+          <a:bodyPr wrap="none" rtlCol="0">
+            <a:spAutoFit/>
+          </a:bodyPr>
+          <a:lstStyle/>
+          <a:p>
+            <a:r>
+              <a:rPr lang="en-US" dirty="0"/>
+              <a:t>x</a:t>
+            </a:r>
+          </a:p>
+        </p:txBody>
+      </p:sp>
+      <p:sp>
+        <p:nvSpPr>
+          <p:cNvPr id="38" name="TextBox 37">
+            <a:extLst>
+              <a:ext uri="{FF2B5EF4-FFF2-40B4-BE49-F238E27FC236}">
+                <a16:creationId xmlns:a16="http://schemas.microsoft.com/office/drawing/2014/main" id="{FF898F70-E6AB-D30A-E62B-4D7F8B8DD962}"/>
+              </a:ext>
+            </a:extLst>
+          </p:cNvPr>
+          <p:cNvSpPr txBox="1"/>
+          <p:nvPr/>
+        </p:nvSpPr>
+        <p:spPr>
+          <a:xfrm>
+            <a:off x="7840348" y="2031508"/>
+            <a:ext cx="287258" cy="369332"/>
+          </a:xfrm>
+          <a:prstGeom prst="rect">
+            <a:avLst/>
+          </a:prstGeom>
+          <a:noFill/>
+        </p:spPr>
+        <p:txBody>
+          <a:bodyPr wrap="none" rtlCol="0">
+            <a:spAutoFit/>
+          </a:bodyPr>
+          <a:lstStyle/>
+          <a:p>
+            <a:r>
+              <a:rPr lang="en-US" dirty="0"/>
+              <a:t>x</a:t>
+            </a:r>
+          </a:p>
+        </p:txBody>
+      </p:sp>
+      <p:cxnSp>
+        <p:nvCxnSpPr>
+          <p:cNvPr id="39" name="Straight Connector 38">
+            <a:extLst>
+              <a:ext uri="{FF2B5EF4-FFF2-40B4-BE49-F238E27FC236}">
+                <a16:creationId xmlns:a16="http://schemas.microsoft.com/office/drawing/2014/main" id="{F5589E28-AEA2-D7B9-0CA1-76D13529DCAE}"/>
+              </a:ext>
+            </a:extLst>
+          </p:cNvPr>
+          <p:cNvCxnSpPr>
+            <a:cxnSpLocks/>
+            <a:stCxn id="34" idx="1"/>
+          </p:cNvCxnSpPr>
+          <p:nvPr/>
+        </p:nvCxnSpPr>
+        <p:spPr>
+          <a:xfrm flipH="1" flipV="1">
+            <a:off x="7147279" y="1870073"/>
+            <a:ext cx="1707380" cy="3499"/>
+          </a:xfrm>
+          <a:prstGeom prst="line">
+            <a:avLst/>
+          </a:prstGeom>
+          <a:ln>
+            <a:prstDash val="dash"/>
+          </a:ln>
+        </p:spPr>
+        <p:style>
+          <a:lnRef idx="2">
+            <a:schemeClr val="accent1"/>
+          </a:lnRef>
+          <a:fillRef idx="0">
+            <a:schemeClr val="accent1"/>
+          </a:fillRef>
+          <a:effectRef idx="1">
+            <a:schemeClr val="accent1"/>
+          </a:effectRef>
+          <a:fontRef idx="minor">
+            <a:schemeClr val="tx1"/>
+          </a:fontRef>
+        </p:style>
+      </p:cxnSp>
+      <p:cxnSp>
+        <p:nvCxnSpPr>
+          <p:cNvPr id="40" name="Straight Connector 39">
+            <a:extLst>
+              <a:ext uri="{FF2B5EF4-FFF2-40B4-BE49-F238E27FC236}">
+                <a16:creationId xmlns:a16="http://schemas.microsoft.com/office/drawing/2014/main" id="{AC4ADA54-364E-7599-E288-F0EEAC325E42}"/>
+              </a:ext>
+            </a:extLst>
+          </p:cNvPr>
+          <p:cNvCxnSpPr>
+            <a:cxnSpLocks/>
+            <a:stCxn id="36" idx="1"/>
+          </p:cNvCxnSpPr>
+          <p:nvPr/>
+        </p:nvCxnSpPr>
+        <p:spPr>
+          <a:xfrm flipH="1">
+            <a:off x="7115947" y="2242904"/>
+            <a:ext cx="1888282" cy="0"/>
+          </a:xfrm>
+          <a:prstGeom prst="line">
+            <a:avLst/>
+          </a:prstGeom>
+          <a:ln>
+            <a:prstDash val="dash"/>
+          </a:ln>
+        </p:spPr>
+        <p:style>
+          <a:lnRef idx="2">
+            <a:schemeClr val="accent1"/>
+          </a:lnRef>
+          <a:fillRef idx="0">
+            <a:schemeClr val="accent1"/>
+          </a:fillRef>
+          <a:effectRef idx="1">
+            <a:schemeClr val="accent1"/>
+          </a:effectRef>
+          <a:fontRef idx="minor">
+            <a:schemeClr val="tx1"/>
+          </a:fontRef>
+        </p:style>
+      </p:cxnSp>
+      <p:cxnSp>
+        <p:nvCxnSpPr>
+          <p:cNvPr id="41" name="Straight Connector 40">
+            <a:extLst>
+              <a:ext uri="{FF2B5EF4-FFF2-40B4-BE49-F238E27FC236}">
+                <a16:creationId xmlns:a16="http://schemas.microsoft.com/office/drawing/2014/main" id="{7502A43E-7288-88F4-7EB0-18A44015BE78}"/>
+              </a:ext>
+            </a:extLst>
+          </p:cNvPr>
+          <p:cNvCxnSpPr>
+            <a:cxnSpLocks/>
+            <a:stCxn id="37" idx="1"/>
+          </p:cNvCxnSpPr>
+          <p:nvPr/>
+        </p:nvCxnSpPr>
+        <p:spPr>
+          <a:xfrm flipH="1" flipV="1">
+            <a:off x="7115947" y="2953599"/>
+            <a:ext cx="1595083" cy="996"/>
+          </a:xfrm>
+          <a:prstGeom prst="line">
+            <a:avLst/>
+          </a:prstGeom>
+        </p:spPr>
+        <p:style>
+          <a:lnRef idx="2">
+            <a:schemeClr val="accent1"/>
+          </a:lnRef>
+          <a:fillRef idx="0">
+            <a:schemeClr val="accent1"/>
+          </a:fillRef>
+          <a:effectRef idx="1">
+            <a:schemeClr val="accent1"/>
+          </a:effectRef>
+          <a:fontRef idx="minor">
+            <a:schemeClr val="tx1"/>
+          </a:fontRef>
+        </p:style>
+      </p:cxnSp>
+      <p:cxnSp>
+        <p:nvCxnSpPr>
+          <p:cNvPr id="42" name="Straight Connector 41">
+            <a:extLst>
+              <a:ext uri="{FF2B5EF4-FFF2-40B4-BE49-F238E27FC236}">
+                <a16:creationId xmlns:a16="http://schemas.microsoft.com/office/drawing/2014/main" id="{F468B623-2E34-3881-C94E-6A80F96A13EA}"/>
+              </a:ext>
+            </a:extLst>
+          </p:cNvPr>
+          <p:cNvCxnSpPr>
+            <a:cxnSpLocks/>
+            <a:endCxn id="38" idx="1"/>
+          </p:cNvCxnSpPr>
+          <p:nvPr/>
+        </p:nvCxnSpPr>
+        <p:spPr>
+          <a:xfrm>
+            <a:off x="7118599" y="2216174"/>
+            <a:ext cx="721749" cy="0"/>
+          </a:xfrm>
+          <a:prstGeom prst="line">
+            <a:avLst/>
+          </a:prstGeom>
+        </p:spPr>
+        <p:style>
+          <a:lnRef idx="2">
+            <a:schemeClr val="accent1"/>
+          </a:lnRef>
+          <a:fillRef idx="0">
+            <a:schemeClr val="accent1"/>
+          </a:fillRef>
+          <a:effectRef idx="1">
+            <a:schemeClr val="accent1"/>
+          </a:effectRef>
+          <a:fontRef idx="minor">
+            <a:schemeClr val="tx1"/>
+          </a:fontRef>
+        </p:style>
+      </p:cxnSp>
+      <p:cxnSp>
+        <p:nvCxnSpPr>
+          <p:cNvPr id="43" name="Straight Connector 42">
+            <a:extLst>
+              <a:ext uri="{FF2B5EF4-FFF2-40B4-BE49-F238E27FC236}">
+                <a16:creationId xmlns:a16="http://schemas.microsoft.com/office/drawing/2014/main" id="{B7BDC666-4C69-5C3F-ECB9-3091D5DAC66A}"/>
+              </a:ext>
+            </a:extLst>
+          </p:cNvPr>
+          <p:cNvCxnSpPr>
+            <a:cxnSpLocks/>
+            <a:stCxn id="35" idx="1"/>
+          </p:cNvCxnSpPr>
+          <p:nvPr/>
+        </p:nvCxnSpPr>
+        <p:spPr>
+          <a:xfrm flipH="1" flipV="1">
+            <a:off x="7115947" y="3489613"/>
+            <a:ext cx="1017282" cy="13487"/>
+          </a:xfrm>
+          <a:prstGeom prst="line">
+            <a:avLst/>
+          </a:prstGeom>
+        </p:spPr>
+        <p:style>
+          <a:lnRef idx="2">
+            <a:schemeClr val="accent1"/>
+          </a:lnRef>
+          <a:fillRef idx="0">
+            <a:schemeClr val="accent1"/>
+          </a:fillRef>
+          <a:effectRef idx="1">
+            <a:schemeClr val="accent1"/>
+          </a:effectRef>
+          <a:fontRef idx="minor">
+            <a:schemeClr val="tx1"/>
+          </a:fontRef>
+        </p:style>
+      </p:cxnSp>
+      <p:cxnSp>
+        <p:nvCxnSpPr>
+          <p:cNvPr id="59" name="Straight Connector 58">
+            <a:extLst>
+              <a:ext uri="{FF2B5EF4-FFF2-40B4-BE49-F238E27FC236}">
+                <a16:creationId xmlns:a16="http://schemas.microsoft.com/office/drawing/2014/main" id="{AA636385-2802-CBD7-B68A-1CC2CAE9E5B3}"/>
+              </a:ext>
+            </a:extLst>
+          </p:cNvPr>
+          <p:cNvCxnSpPr>
+            <a:cxnSpLocks/>
+          </p:cNvCxnSpPr>
+          <p:nvPr/>
+        </p:nvCxnSpPr>
+        <p:spPr>
+          <a:xfrm flipH="1">
+            <a:off x="7115947" y="2776928"/>
+            <a:ext cx="180000" cy="0"/>
+          </a:xfrm>
+          <a:prstGeom prst="line">
+            <a:avLst/>
+          </a:prstGeom>
+        </p:spPr>
+        <p:style>
+          <a:lnRef idx="2">
+            <a:schemeClr val="accent1"/>
+          </a:lnRef>
+          <a:fillRef idx="0">
+            <a:schemeClr val="accent1"/>
+          </a:fillRef>
+          <a:effectRef idx="1">
+            <a:schemeClr val="accent1"/>
+          </a:effectRef>
+          <a:fontRef idx="minor">
+            <a:schemeClr val="tx1"/>
+          </a:fontRef>
+        </p:style>
+      </p:cxnSp>
+      <mc:AlternateContent xmlns:mc="http://schemas.openxmlformats.org/markup-compatibility/2006">
+        <mc:Choice xmlns:a14="http://schemas.microsoft.com/office/drawing/2010/main" Requires="a14">
+          <p:sp>
+            <p:nvSpPr>
+              <p:cNvPr id="2" name="TextBox 1">
+                <a:extLst>
+                  <a:ext uri="{FF2B5EF4-FFF2-40B4-BE49-F238E27FC236}">
+                    <a16:creationId xmlns:a16="http://schemas.microsoft.com/office/drawing/2014/main" id="{9D421A14-A5F0-7E94-1FB3-62461933EF92}"/>
+                  </a:ext>
+                </a:extLst>
+              </p:cNvPr>
+              <p:cNvSpPr txBox="1"/>
+              <p:nvPr/>
+            </p:nvSpPr>
+            <p:spPr>
+              <a:xfrm>
+                <a:off x="4536886" y="3895411"/>
+                <a:ext cx="1010341" cy="369332"/>
+              </a:xfrm>
+              <a:prstGeom prst="rect">
+                <a:avLst/>
+              </a:prstGeom>
+              <a:noFill/>
+            </p:spPr>
+            <p:txBody>
+              <a:bodyPr wrap="none" rtlCol="0">
+                <a:spAutoFit/>
+              </a:bodyPr>
+              <a:lstStyle/>
+              <a:p>
+                <a:r>
+                  <a:rPr lang="en-US" dirty="0"/>
+                  <a:t>Arc </a:t>
+                </a:r>
+                <a14:m>
+                  <m:oMath xmlns:m="http://schemas.openxmlformats.org/officeDocument/2006/math">
+                    <m:r>
+                      <a:rPr lang="en-US" i="1" dirty="0" smtClean="0">
+                        <a:latin typeface="Cambria Math" panose="02040503050406030204" pitchFamily="18" charset="0"/>
+                        <a:ea typeface="Cambria Math" panose="02040503050406030204" pitchFamily="18" charset="0"/>
+                      </a:rPr>
+                      <m:t>(</m:t>
+                    </m:r>
+                    <m:r>
+                      <a:rPr lang="en-IE" b="0" i="1" dirty="0" smtClean="0">
+                        <a:latin typeface="Cambria Math" panose="02040503050406030204" pitchFamily="18" charset="0"/>
+                        <a:ea typeface="Cambria Math" panose="02040503050406030204" pitchFamily="18" charset="0"/>
+                      </a:rPr>
+                      <m:t>𝑖</m:t>
+                    </m:r>
+                    <m:r>
+                      <a:rPr lang="en-US" i="1" dirty="0" err="1" smtClean="0">
+                        <a:latin typeface="Cambria Math" panose="02040503050406030204" pitchFamily="18" charset="0"/>
+                        <a:ea typeface="Cambria Math" panose="02040503050406030204" pitchFamily="18" charset="0"/>
+                      </a:rPr>
+                      <m:t>,</m:t>
+                    </m:r>
+                    <m:r>
+                      <a:rPr lang="en-IE" b="0" i="1" dirty="0" smtClean="0">
+                        <a:latin typeface="Cambria Math" panose="02040503050406030204" pitchFamily="18" charset="0"/>
+                        <a:ea typeface="Cambria Math" panose="02040503050406030204" pitchFamily="18" charset="0"/>
+                      </a:rPr>
+                      <m:t>𝑗</m:t>
+                    </m:r>
+                    <m:r>
+                      <a:rPr lang="en-US" i="1" dirty="0" smtClean="0">
+                        <a:latin typeface="Cambria Math" panose="02040503050406030204" pitchFamily="18" charset="0"/>
+                        <a:ea typeface="Cambria Math" panose="02040503050406030204" pitchFamily="18" charset="0"/>
+                      </a:rPr>
+                      <m:t>)</m:t>
+                    </m:r>
+                  </m:oMath>
+                </a14:m>
+                <a:endParaRPr lang="en-US" dirty="0">
+                  <a:latin typeface="Cambria Math" panose="02040503050406030204" pitchFamily="18" charset="0"/>
+                  <a:ea typeface="Cambria Math" panose="02040503050406030204" pitchFamily="18" charset="0"/>
+                </a:endParaRPr>
+              </a:p>
+            </p:txBody>
+          </p:sp>
+        </mc:Choice>
+        <mc:Fallback>
+          <p:sp>
+            <p:nvSpPr>
+              <p:cNvPr id="2" name="TextBox 1">
+                <a:extLst>
+                  <a:ext uri="{FF2B5EF4-FFF2-40B4-BE49-F238E27FC236}">
+                    <a16:creationId xmlns:a16="http://schemas.microsoft.com/office/drawing/2014/main" id="{9D421A14-A5F0-7E94-1FB3-62461933EF92}"/>
+                  </a:ext>
+                </a:extLst>
+              </p:cNvPr>
+              <p:cNvSpPr txBox="1">
+                <a:spLocks noRot="1" noChangeAspect="1" noMove="1" noResize="1" noEditPoints="1" noAdjustHandles="1" noChangeArrowheads="1" noChangeShapeType="1" noTextEdit="1"/>
+              </p:cNvSpPr>
+              <p:nvPr/>
+            </p:nvSpPr>
+            <p:spPr>
+              <a:xfrm>
+                <a:off x="4536886" y="3895411"/>
+                <a:ext cx="1010341" cy="369332"/>
+              </a:xfrm>
+              <a:prstGeom prst="rect">
+                <a:avLst/>
+              </a:prstGeom>
+              <a:blipFill>
+                <a:blip r:embed="rId2"/>
+                <a:stretch>
+                  <a:fillRect l="-5000" t="-6667" r="-1250" b="-26667"/>
+                </a:stretch>
+              </a:blipFill>
+            </p:spPr>
+            <p:txBody>
+              <a:bodyPr/>
+              <a:lstStyle/>
+              <a:p>
+                <a:r>
+                  <a:rPr lang="en-US">
+                    <a:noFill/>
+                  </a:rPr>
+                  <a:t> </a:t>
+                </a:r>
+              </a:p>
+            </p:txBody>
+          </p:sp>
+        </mc:Fallback>
+      </mc:AlternateContent>
+    </p:spTree>
+    <p:extLst>
+      <p:ext uri="{BB962C8B-B14F-4D97-AF65-F5344CB8AC3E}">
+        <p14:creationId xmlns:p14="http://schemas.microsoft.com/office/powerpoint/2010/main" val="4051815020"/>
       </p:ext>
     </p:extLst>
   </p:cSld>
